--- a/data/memories/memory_01/locales/es/documents/presentations/Presentation Q3 FINAL v2.pptx
+++ b/data/memories/memory_01/locales/es/documents/presentations/Presentation Q3 FINAL v2.pptx
@@ -3108,7 +3108,7 @@
           <a:lstStyle/>
           <a:p>
             <a:r>
-              <a:t>Q3 Business Review</a:t>
+              <a:t>Revisión comercial del tercer trimestre</a:t>
             </a:r>
           </a:p>
         </p:txBody>
@@ -3132,7 +3132,7 @@
               <a:defRPr sz="2200"/>
             </a:pPr>
             <a:r>
-              <a:t>Updated version following management feedback.</a:t>
+              <a:t>Versión actualizada siguiendo los comentarios de la administración.</a:t>
             </a:r>
           </a:p>
           <a:p>
@@ -3140,7 +3140,7 @@
               <a:defRPr sz="2200"/>
             </a:pPr>
             <a:r>
-              <a:t>Adjusted emphasis on operational achievements.</a:t>
+              <a:t>Énfasis ajustado en los logros operativos.</a:t>
             </a:r>
           </a:p>
         </p:txBody>
@@ -3179,7 +3179,7 @@
           <a:lstStyle/>
           <a:p>
             <a:r>
-              <a:t>Financial Overview</a:t>
+              <a:t>Resumen financiero</a:t>
             </a:r>
           </a:p>
         </p:txBody>
@@ -3203,7 +3203,7 @@
               <a:defRPr sz="2200"/>
             </a:pPr>
             <a:r>
-              <a:t>Quarter completed successfully.</a:t>
+              <a:t>Trimestre completado con éxito.</a:t>
             </a:r>
           </a:p>
           <a:p>
@@ -3211,7 +3211,7 @@
               <a:defRPr sz="2200"/>
             </a:pPr>
             <a:r>
-              <a:t>Archive project required additional resources.</a:t>
+              <a:t>El proyecto de archivo requirió recursos adicionales.</a:t>
             </a:r>
           </a:p>
           <a:p>
@@ -3219,7 +3219,7 @@
               <a:defRPr sz="2200"/>
             </a:pPr>
             <a:r>
-              <a:t>Additional investment approved.</a:t>
+              <a:t>Inversión adicional aprobada.</a:t>
             </a:r>
           </a:p>
         </p:txBody>
@@ -3258,7 +3258,7 @@
           <a:lstStyle/>
           <a:p>
             <a:r>
-              <a:t>Archive Progress</a:t>
+              <a:t>Progreso del archivo</a:t>
             </a:r>
           </a:p>
         </p:txBody>
@@ -3282,7 +3282,7 @@
               <a:defRPr sz="2200"/>
             </a:pPr>
             <a:r>
-              <a:t>Historical documentation review continues.</a:t>
+              <a:t>Continúa la revisión de la documentación histórica.</a:t>
             </a:r>
           </a:p>
           <a:p>
@@ -3290,7 +3290,7 @@
               <a:defRPr sz="2200"/>
             </a:pPr>
             <a:r>
-              <a:t>Document classification improving.</a:t>
+              <a:t>Mejora de la clasificación de documentos.</a:t>
             </a:r>
           </a:p>
           <a:p>
@@ -3298,7 +3298,7 @@
               <a:defRPr sz="2200"/>
             </a:pPr>
             <a:r>
-              <a:t>Physical archive reduction postponed.</a:t>
+              <a:t>Se pospone la reducción del archivo físico.</a:t>
             </a:r>
           </a:p>
         </p:txBody>
@@ -3337,7 +3337,7 @@
           <a:lstStyle/>
           <a:p>
             <a:r>
-              <a:t>Human Resources Update</a:t>
+              <a:t>Actualización de Recursos Humanos</a:t>
             </a:r>
           </a:p>
         </p:txBody>
@@ -3361,7 +3361,7 @@
               <a:defRPr sz="2200"/>
             </a:pPr>
             <a:r>
-              <a:t>Employee documentation review completed.</a:t>
+              <a:t>Revisión de la documentación del empleado completada.</a:t>
             </a:r>
           </a:p>
           <a:p>
@@ -3369,7 +3369,7 @@
               <a:defRPr sz="2200"/>
             </a:pPr>
             <a:r>
-              <a:t>Registry updated following organisational changes.</a:t>
+              <a:t>Registro actualizado tras cambios organizativos.</a:t>
             </a:r>
           </a:p>
           <a:p>
@@ -3377,7 +3377,7 @@
               <a:defRPr sz="2200"/>
             </a:pPr>
             <a:r>
-              <a:t>Historical records preserved.</a:t>
+              <a:t>Registros históricos preservados.</a:t>
             </a:r>
           </a:p>
         </p:txBody>
@@ -3416,7 +3416,7 @@
           <a:lstStyle/>
           <a:p>
             <a:r>
-              <a:t>Management Notes</a:t>
+              <a:t>Notas de gestión</a:t>
             </a:r>
           </a:p>
         </p:txBody>
@@ -3440,7 +3440,7 @@
               <a:defRPr sz="2200"/>
             </a:pPr>
             <a:r>
-              <a:t>Avoid presenting unresolved historical documentation issues.</a:t>
+              <a:t>Evite presentar cuestiones de documentación histórica no resueltas.</a:t>
             </a:r>
           </a:p>
           <a:p>
@@ -3448,7 +3448,7 @@
               <a:defRPr sz="2200"/>
             </a:pPr>
             <a:r>
-              <a:t>Focus communication on completed actions.</a:t>
+              <a:t>Centrar la comunicación en las acciones completadas.</a:t>
             </a:r>
           </a:p>
         </p:txBody>
